--- a/docs/allergen_ar_presentation.pptx
+++ b/docs/allergen_ar_presentation.pptx
@@ -162,7 +162,7 @@
     </p:spTree>
     <p:extLst>
       <p:ext uri="{BB962C8B-B14F-4D97-AF65-F5344CB8AC3E}">
-        <p14:creationId xmlns:p14="http://schemas.microsoft.com/office/powerpoint/2010/main" val="1235183083"/>
+        <p14:creationId xmlns:p14="http://schemas.microsoft.com/office/powerpoint/2010/main" val="1557171687"/>
       </p:ext>
     </p:extLst>
   </p:cSld>
@@ -4300,14 +4300,14 @@
       </p:sp>
       <p:sp>
         <p:nvSpPr>
-          <p:cNvPr id="7" name="TextBox 6"/>
+          <p:cNvPr id="9" name="TextBox 8"/>
           <p:cNvSpPr txBox="1"/>
           <p:nvPr/>
         </p:nvSpPr>
         <p:spPr>
           <a:xfrm>
-            <a:off x="822960" y="2606040"/>
-            <a:ext cx="6309360" cy="1737360"/>
+            <a:off x="548640" y="6510528"/>
+            <a:ext cx="7315200" cy="274320"/>
           </a:xfrm>
           <a:prstGeom prst="rect">
             <a:avLst/>
@@ -4322,47 +4322,31 @@
           <a:p>
             <a:pPr algn="l">
               <a:spcAft>
-                <a:spcPts val="1000"/>
-              </a:spcAft>
-            </a:pPr>
-            <a:r>
-              <a:rPr sz="1900" b="1" i="0">
-                <a:solidFill>
-                  <a:srgbClr val="1A1E27"/>
+                <a:spcPts val="600"/>
+              </a:spcAft>
+            </a:pPr>
+            <a:r>
+              <a:rPr sz="1000" b="0" i="0">
+                <a:solidFill>
+                  <a:srgbClr val="4A5260"/>
                 </a:solidFill>
                 <a:latin typeface="Segoe UI"/>
               </a:rPr>
-              <a:t>Millions of people can't tell if a meal will hurt them — until it's too late.</a:t>
-            </a:r>
-          </a:p>
-          <a:p>
-            <a:pPr algn="l">
-              <a:spcAft>
-                <a:spcPts val="600"/>
-              </a:spcAft>
-            </a:pPr>
-            <a:r>
-              <a:rPr sz="1450" b="0" i="0">
-                <a:solidFill>
-                  <a:srgbClr val="4A5260"/>
-                </a:solidFill>
-                <a:latin typeface="Segoe UI"/>
-              </a:rPr>
-              <a:t>A menu doesn't list hidden ingredients. A home-cooked dish has no label. We built glasses that answer “is this safe?” the moment you look at your food and ask.</a:t>
-            </a:r>
-          </a:p>
-        </p:txBody>
-      </p:sp>
-      <p:sp>
-        <p:nvSpPr>
-          <p:cNvPr id="8" name="TextBox 7"/>
+              <a:t>AI-Powered Allergen Detection  |  AR Glasses · Edge AI · Multipath QUIC</a:t>
+            </a:r>
+          </a:p>
+        </p:txBody>
+      </p:sp>
+      <p:sp>
+        <p:nvSpPr>
+          <p:cNvPr id="10" name="TextBox 9"/>
           <p:cNvSpPr txBox="1"/>
           <p:nvPr/>
         </p:nvSpPr>
         <p:spPr>
           <a:xfrm>
-            <a:off x="7543800" y="2286000"/>
-            <a:ext cx="4114800" cy="274320"/>
+            <a:off x="10881360" y="6510528"/>
+            <a:ext cx="822960" cy="274320"/>
           </a:xfrm>
           <a:prstGeom prst="rect">
             <a:avLst/>
@@ -4375,609 +4359,18 @@
           </a:bodyPr>
           <a:lstStyle/>
           <a:p>
-            <a:pPr algn="l">
+            <a:pPr algn="r">
               <a:spcAft>
                 <a:spcPts val="600"/>
               </a:spcAft>
             </a:pPr>
             <a:r>
-              <a:rPr sz="1100" b="1" i="0">
-                <a:solidFill>
-                  <a:srgbClr val="083D82"/>
+              <a:rPr sz="1000" b="0" i="0">
+                <a:solidFill>
+                  <a:srgbClr val="4A5260"/>
                 </a:solidFill>
                 <a:latin typeface="Segoe UI"/>
               </a:rPr>
-              <a:t>9 MAJOR ALLERGEN CATEGORIES</a:t>
-            </a:r>
-          </a:p>
-        </p:txBody>
-      </p:sp>
-      <p:sp>
-        <p:nvSpPr>
-          <p:cNvPr id="9" name="Rounded Rectangle 8"/>
-          <p:cNvSpPr/>
-          <p:nvPr/>
-        </p:nvSpPr>
-        <p:spPr>
-          <a:xfrm>
-            <a:off x="7543800" y="2606040"/>
-            <a:ext cx="1298448" cy="457200"/>
-          </a:xfrm>
-          <a:prstGeom prst="roundRect">
-            <a:avLst>
-              <a:gd name="adj" fmla="val 50000"/>
-            </a:avLst>
-          </a:prstGeom>
-          <a:solidFill>
-            <a:srgbClr val="FFFFFF"/>
-          </a:solidFill>
-          <a:ln w="12700">
-            <a:solidFill>
-              <a:srgbClr val="DCE2EA"/>
-            </a:solidFill>
-          </a:ln>
-          <a:effectLst/>
-        </p:spPr>
-        <p:style>
-          <a:lnRef idx="1">
-            <a:schemeClr val="accent1"/>
-          </a:lnRef>
-          <a:fillRef idx="3">
-            <a:schemeClr val="accent1"/>
-          </a:fillRef>
-          <a:effectRef idx="2">
-            <a:schemeClr val="accent1"/>
-          </a:effectRef>
-          <a:fontRef idx="minor">
-            <a:schemeClr val="lt1"/>
-          </a:fontRef>
-        </p:style>
-        <p:txBody>
-          <a:bodyPr wrap="square" lIns="76200" tIns="25400" rIns="76200" bIns="25400" rtlCol="0" anchor="ctr"/>
-          <a:lstStyle/>
-          <a:p>
-            <a:pPr algn="ctr"/>
-            <a:r>
-              <a:rPr sz="1250" b="1" i="0">
-                <a:solidFill>
-                  <a:srgbClr val="1A1E27"/>
-                </a:solidFill>
-                <a:latin typeface="Segoe UI"/>
-              </a:rPr>
-              <a:t>Peanuts</a:t>
-            </a:r>
-          </a:p>
-        </p:txBody>
-      </p:sp>
-      <p:sp>
-        <p:nvSpPr>
-          <p:cNvPr id="10" name="Rounded Rectangle 9"/>
-          <p:cNvSpPr/>
-          <p:nvPr/>
-        </p:nvSpPr>
-        <p:spPr>
-          <a:xfrm>
-            <a:off x="8951976" y="2606040"/>
-            <a:ext cx="1298448" cy="457200"/>
-          </a:xfrm>
-          <a:prstGeom prst="roundRect">
-            <a:avLst>
-              <a:gd name="adj" fmla="val 50000"/>
-            </a:avLst>
-          </a:prstGeom>
-          <a:solidFill>
-            <a:srgbClr val="FFFFFF"/>
-          </a:solidFill>
-          <a:ln w="12700">
-            <a:solidFill>
-              <a:srgbClr val="DCE2EA"/>
-            </a:solidFill>
-          </a:ln>
-          <a:effectLst/>
-        </p:spPr>
-        <p:style>
-          <a:lnRef idx="1">
-            <a:schemeClr val="accent1"/>
-          </a:lnRef>
-          <a:fillRef idx="3">
-            <a:schemeClr val="accent1"/>
-          </a:fillRef>
-          <a:effectRef idx="2">
-            <a:schemeClr val="accent1"/>
-          </a:effectRef>
-          <a:fontRef idx="minor">
-            <a:schemeClr val="lt1"/>
-          </a:fontRef>
-        </p:style>
-        <p:txBody>
-          <a:bodyPr wrap="square" lIns="76200" tIns="25400" rIns="76200" bIns="25400" rtlCol="0" anchor="ctr"/>
-          <a:lstStyle/>
-          <a:p>
-            <a:pPr algn="ctr"/>
-            <a:r>
-              <a:rPr sz="1250" b="1" i="0">
-                <a:solidFill>
-                  <a:srgbClr val="1A1E27"/>
-                </a:solidFill>
-                <a:latin typeface="Segoe UI"/>
-              </a:rPr>
-              <a:t>Tree Nuts</a:t>
-            </a:r>
-          </a:p>
-        </p:txBody>
-      </p:sp>
-      <p:sp>
-        <p:nvSpPr>
-          <p:cNvPr id="11" name="Rounded Rectangle 10"/>
-          <p:cNvSpPr/>
-          <p:nvPr/>
-        </p:nvSpPr>
-        <p:spPr>
-          <a:xfrm>
-            <a:off x="10360152" y="2606040"/>
-            <a:ext cx="1298448" cy="457200"/>
-          </a:xfrm>
-          <a:prstGeom prst="roundRect">
-            <a:avLst>
-              <a:gd name="adj" fmla="val 50000"/>
-            </a:avLst>
-          </a:prstGeom>
-          <a:solidFill>
-            <a:srgbClr val="FFFFFF"/>
-          </a:solidFill>
-          <a:ln w="12700">
-            <a:solidFill>
-              <a:srgbClr val="DCE2EA"/>
-            </a:solidFill>
-          </a:ln>
-          <a:effectLst/>
-        </p:spPr>
-        <p:style>
-          <a:lnRef idx="1">
-            <a:schemeClr val="accent1"/>
-          </a:lnRef>
-          <a:fillRef idx="3">
-            <a:schemeClr val="accent1"/>
-          </a:fillRef>
-          <a:effectRef idx="2">
-            <a:schemeClr val="accent1"/>
-          </a:effectRef>
-          <a:fontRef idx="minor">
-            <a:schemeClr val="lt1"/>
-          </a:fontRef>
-        </p:style>
-        <p:txBody>
-          <a:bodyPr wrap="square" lIns="76200" tIns="25400" rIns="76200" bIns="25400" rtlCol="0" anchor="ctr"/>
-          <a:lstStyle/>
-          <a:p>
-            <a:pPr algn="ctr"/>
-            <a:r>
-              <a:rPr sz="1250" b="1" i="0">
-                <a:solidFill>
-                  <a:srgbClr val="1A1E27"/>
-                </a:solidFill>
-                <a:latin typeface="Segoe UI"/>
-              </a:rPr>
-              <a:t>Dairy</a:t>
-            </a:r>
-          </a:p>
-        </p:txBody>
-      </p:sp>
-      <p:sp>
-        <p:nvSpPr>
-          <p:cNvPr id="12" name="Rounded Rectangle 11"/>
-          <p:cNvSpPr/>
-          <p:nvPr/>
-        </p:nvSpPr>
-        <p:spPr>
-          <a:xfrm>
-            <a:off x="7543800" y="3172968"/>
-            <a:ext cx="1298448" cy="457200"/>
-          </a:xfrm>
-          <a:prstGeom prst="roundRect">
-            <a:avLst>
-              <a:gd name="adj" fmla="val 50000"/>
-            </a:avLst>
-          </a:prstGeom>
-          <a:solidFill>
-            <a:srgbClr val="FFFFFF"/>
-          </a:solidFill>
-          <a:ln w="12700">
-            <a:solidFill>
-              <a:srgbClr val="DCE2EA"/>
-            </a:solidFill>
-          </a:ln>
-          <a:effectLst/>
-        </p:spPr>
-        <p:style>
-          <a:lnRef idx="1">
-            <a:schemeClr val="accent1"/>
-          </a:lnRef>
-          <a:fillRef idx="3">
-            <a:schemeClr val="accent1"/>
-          </a:fillRef>
-          <a:effectRef idx="2">
-            <a:schemeClr val="accent1"/>
-          </a:effectRef>
-          <a:fontRef idx="minor">
-            <a:schemeClr val="lt1"/>
-          </a:fontRef>
-        </p:style>
-        <p:txBody>
-          <a:bodyPr wrap="square" lIns="76200" tIns="25400" rIns="76200" bIns="25400" rtlCol="0" anchor="ctr"/>
-          <a:lstStyle/>
-          <a:p>
-            <a:pPr algn="ctr"/>
-            <a:r>
-              <a:rPr sz="1250" b="1" i="0">
-                <a:solidFill>
-                  <a:srgbClr val="1A1E27"/>
-                </a:solidFill>
-                <a:latin typeface="Segoe UI"/>
-              </a:rPr>
-              <a:t>Eggs</a:t>
-            </a:r>
-          </a:p>
-        </p:txBody>
-      </p:sp>
-      <p:sp>
-        <p:nvSpPr>
-          <p:cNvPr id="13" name="Rounded Rectangle 12"/>
-          <p:cNvSpPr/>
-          <p:nvPr/>
-        </p:nvSpPr>
-        <p:spPr>
-          <a:xfrm>
-            <a:off x="8951976" y="3172968"/>
-            <a:ext cx="1298448" cy="457200"/>
-          </a:xfrm>
-          <a:prstGeom prst="roundRect">
-            <a:avLst>
-              <a:gd name="adj" fmla="val 50000"/>
-            </a:avLst>
-          </a:prstGeom>
-          <a:solidFill>
-            <a:srgbClr val="FFFFFF"/>
-          </a:solidFill>
-          <a:ln w="12700">
-            <a:solidFill>
-              <a:srgbClr val="DCE2EA"/>
-            </a:solidFill>
-          </a:ln>
-          <a:effectLst/>
-        </p:spPr>
-        <p:style>
-          <a:lnRef idx="1">
-            <a:schemeClr val="accent1"/>
-          </a:lnRef>
-          <a:fillRef idx="3">
-            <a:schemeClr val="accent1"/>
-          </a:fillRef>
-          <a:effectRef idx="2">
-            <a:schemeClr val="accent1"/>
-          </a:effectRef>
-          <a:fontRef idx="minor">
-            <a:schemeClr val="lt1"/>
-          </a:fontRef>
-        </p:style>
-        <p:txBody>
-          <a:bodyPr wrap="square" lIns="76200" tIns="25400" rIns="76200" bIns="25400" rtlCol="0" anchor="ctr"/>
-          <a:lstStyle/>
-          <a:p>
-            <a:pPr algn="ctr"/>
-            <a:r>
-              <a:rPr sz="1250" b="1" i="0">
-                <a:solidFill>
-                  <a:srgbClr val="1A1E27"/>
-                </a:solidFill>
-                <a:latin typeface="Segoe UI"/>
-              </a:rPr>
-              <a:t>Shellfish</a:t>
-            </a:r>
-          </a:p>
-        </p:txBody>
-      </p:sp>
-      <p:sp>
-        <p:nvSpPr>
-          <p:cNvPr id="14" name="Rounded Rectangle 13"/>
-          <p:cNvSpPr/>
-          <p:nvPr/>
-        </p:nvSpPr>
-        <p:spPr>
-          <a:xfrm>
-            <a:off x="10360152" y="3172968"/>
-            <a:ext cx="1298448" cy="457200"/>
-          </a:xfrm>
-          <a:prstGeom prst="roundRect">
-            <a:avLst>
-              <a:gd name="adj" fmla="val 50000"/>
-            </a:avLst>
-          </a:prstGeom>
-          <a:solidFill>
-            <a:srgbClr val="FFFFFF"/>
-          </a:solidFill>
-          <a:ln w="12700">
-            <a:solidFill>
-              <a:srgbClr val="DCE2EA"/>
-            </a:solidFill>
-          </a:ln>
-          <a:effectLst/>
-        </p:spPr>
-        <p:style>
-          <a:lnRef idx="1">
-            <a:schemeClr val="accent1"/>
-          </a:lnRef>
-          <a:fillRef idx="3">
-            <a:schemeClr val="accent1"/>
-          </a:fillRef>
-          <a:effectRef idx="2">
-            <a:schemeClr val="accent1"/>
-          </a:effectRef>
-          <a:fontRef idx="minor">
-            <a:schemeClr val="lt1"/>
-          </a:fontRef>
-        </p:style>
-        <p:txBody>
-          <a:bodyPr wrap="square" lIns="76200" tIns="25400" rIns="76200" bIns="25400" rtlCol="0" anchor="ctr"/>
-          <a:lstStyle/>
-          <a:p>
-            <a:pPr algn="ctr"/>
-            <a:r>
-              <a:rPr sz="1250" b="1" i="0">
-                <a:solidFill>
-                  <a:srgbClr val="1A1E27"/>
-                </a:solidFill>
-                <a:latin typeface="Segoe UI"/>
-              </a:rPr>
-              <a:t>Fish</a:t>
-            </a:r>
-          </a:p>
-        </p:txBody>
-      </p:sp>
-      <p:sp>
-        <p:nvSpPr>
-          <p:cNvPr id="15" name="Rounded Rectangle 14"/>
-          <p:cNvSpPr/>
-          <p:nvPr/>
-        </p:nvSpPr>
-        <p:spPr>
-          <a:xfrm>
-            <a:off x="7543800" y="3739896"/>
-            <a:ext cx="1298448" cy="457200"/>
-          </a:xfrm>
-          <a:prstGeom prst="roundRect">
-            <a:avLst>
-              <a:gd name="adj" fmla="val 50000"/>
-            </a:avLst>
-          </a:prstGeom>
-          <a:solidFill>
-            <a:srgbClr val="FFFFFF"/>
-          </a:solidFill>
-          <a:ln w="12700">
-            <a:solidFill>
-              <a:srgbClr val="DCE2EA"/>
-            </a:solidFill>
-          </a:ln>
-          <a:effectLst/>
-        </p:spPr>
-        <p:style>
-          <a:lnRef idx="1">
-            <a:schemeClr val="accent1"/>
-          </a:lnRef>
-          <a:fillRef idx="3">
-            <a:schemeClr val="accent1"/>
-          </a:fillRef>
-          <a:effectRef idx="2">
-            <a:schemeClr val="accent1"/>
-          </a:effectRef>
-          <a:fontRef idx="minor">
-            <a:schemeClr val="lt1"/>
-          </a:fontRef>
-        </p:style>
-        <p:txBody>
-          <a:bodyPr wrap="square" lIns="76200" tIns="25400" rIns="76200" bIns="25400" rtlCol="0" anchor="ctr"/>
-          <a:lstStyle/>
-          <a:p>
-            <a:pPr algn="ctr"/>
-            <a:r>
-              <a:rPr sz="1250" b="1" i="0">
-                <a:solidFill>
-                  <a:srgbClr val="1A1E27"/>
-                </a:solidFill>
-                <a:latin typeface="Segoe UI"/>
-              </a:rPr>
-              <a:t>Soy</a:t>
-            </a:r>
-          </a:p>
-        </p:txBody>
-      </p:sp>
-      <p:sp>
-        <p:nvSpPr>
-          <p:cNvPr id="16" name="Rounded Rectangle 15"/>
-          <p:cNvSpPr/>
-          <p:nvPr/>
-        </p:nvSpPr>
-        <p:spPr>
-          <a:xfrm>
-            <a:off x="8951976" y="3739896"/>
-            <a:ext cx="1298448" cy="457200"/>
-          </a:xfrm>
-          <a:prstGeom prst="roundRect">
-            <a:avLst>
-              <a:gd name="adj" fmla="val 50000"/>
-            </a:avLst>
-          </a:prstGeom>
-          <a:solidFill>
-            <a:srgbClr val="FFFFFF"/>
-          </a:solidFill>
-          <a:ln w="12700">
-            <a:solidFill>
-              <a:srgbClr val="DCE2EA"/>
-            </a:solidFill>
-          </a:ln>
-          <a:effectLst/>
-        </p:spPr>
-        <p:style>
-          <a:lnRef idx="1">
-            <a:schemeClr val="accent1"/>
-          </a:lnRef>
-          <a:fillRef idx="3">
-            <a:schemeClr val="accent1"/>
-          </a:fillRef>
-          <a:effectRef idx="2">
-            <a:schemeClr val="accent1"/>
-          </a:effectRef>
-          <a:fontRef idx="minor">
-            <a:schemeClr val="lt1"/>
-          </a:fontRef>
-        </p:style>
-        <p:txBody>
-          <a:bodyPr wrap="square" lIns="76200" tIns="25400" rIns="76200" bIns="25400" rtlCol="0" anchor="ctr"/>
-          <a:lstStyle/>
-          <a:p>
-            <a:pPr algn="ctr"/>
-            <a:r>
-              <a:rPr sz="1250" b="1" i="0">
-                <a:solidFill>
-                  <a:srgbClr val="1A1E27"/>
-                </a:solidFill>
-                <a:latin typeface="Segoe UI"/>
-              </a:rPr>
-              <a:t>Wheat</a:t>
-            </a:r>
-          </a:p>
-        </p:txBody>
-      </p:sp>
-      <p:sp>
-        <p:nvSpPr>
-          <p:cNvPr id="17" name="Rounded Rectangle 16"/>
-          <p:cNvSpPr/>
-          <p:nvPr/>
-        </p:nvSpPr>
-        <p:spPr>
-          <a:xfrm>
-            <a:off x="10360152" y="3739896"/>
-            <a:ext cx="1298448" cy="457200"/>
-          </a:xfrm>
-          <a:prstGeom prst="roundRect">
-            <a:avLst>
-              <a:gd name="adj" fmla="val 50000"/>
-            </a:avLst>
-          </a:prstGeom>
-          <a:solidFill>
-            <a:srgbClr val="FFFFFF"/>
-          </a:solidFill>
-          <a:ln w="12700">
-            <a:solidFill>
-              <a:srgbClr val="DCE2EA"/>
-            </a:solidFill>
-          </a:ln>
-          <a:effectLst/>
-        </p:spPr>
-        <p:style>
-          <a:lnRef idx="1">
-            <a:schemeClr val="accent1"/>
-          </a:lnRef>
-          <a:fillRef idx="3">
-            <a:schemeClr val="accent1"/>
-          </a:fillRef>
-          <a:effectRef idx="2">
-            <a:schemeClr val="accent1"/>
-          </a:effectRef>
-          <a:fontRef idx="minor">
-            <a:schemeClr val="lt1"/>
-          </a:fontRef>
-        </p:style>
-        <p:txBody>
-          <a:bodyPr wrap="square" lIns="76200" tIns="25400" rIns="76200" bIns="25400" rtlCol="0" anchor="ctr"/>
-          <a:lstStyle/>
-          <a:p>
-            <a:pPr algn="ctr"/>
-            <a:r>
-              <a:rPr sz="1250" b="1" i="0">
-                <a:solidFill>
-                  <a:srgbClr val="1A1E27"/>
-                </a:solidFill>
-                <a:latin typeface="Segoe UI"/>
-              </a:rPr>
-              <a:t>Sesame</a:t>
-            </a:r>
-          </a:p>
-        </p:txBody>
-      </p:sp>
-      <p:sp>
-        <p:nvSpPr>
-          <p:cNvPr id="18" name="TextBox 17"/>
-          <p:cNvSpPr txBox="1"/>
-          <p:nvPr/>
-        </p:nvSpPr>
-        <p:spPr>
-          <a:xfrm>
-            <a:off x="548640" y="6510528"/>
-            <a:ext cx="7315200" cy="274320"/>
-          </a:xfrm>
-          <a:prstGeom prst="rect">
-            <a:avLst/>
-          </a:prstGeom>
-          <a:noFill/>
-        </p:spPr>
-        <p:txBody>
-          <a:bodyPr wrap="square" lIns="0" tIns="0" rIns="0" bIns="0" anchor="t">
-            <a:spAutoFit/>
-          </a:bodyPr>
-          <a:lstStyle/>
-          <a:p>
-            <a:pPr algn="l">
-              <a:spcAft>
-                <a:spcPts val="600"/>
-              </a:spcAft>
-            </a:pPr>
-            <a:r>
-              <a:rPr sz="1000" b="0" i="0">
-                <a:solidFill>
-                  <a:srgbClr val="4A5260"/>
-                </a:solidFill>
-                <a:latin typeface="Segoe UI"/>
-              </a:rPr>
-              <a:t>AI-Powered Allergen Detection  |  AR Glasses · Edge AI · Multipath QUIC</a:t>
-            </a:r>
-          </a:p>
-        </p:txBody>
-      </p:sp>
-      <p:sp>
-        <p:nvSpPr>
-          <p:cNvPr id="19" name="TextBox 18"/>
-          <p:cNvSpPr txBox="1"/>
-          <p:nvPr/>
-        </p:nvSpPr>
-        <p:spPr>
-          <a:xfrm>
-            <a:off x="10881360" y="6510528"/>
-            <a:ext cx="822960" cy="274320"/>
-          </a:xfrm>
-          <a:prstGeom prst="rect">
-            <a:avLst/>
-          </a:prstGeom>
-          <a:noFill/>
-        </p:spPr>
-        <p:txBody>
-          <a:bodyPr wrap="square" lIns="0" tIns="0" rIns="0" bIns="0" anchor="t">
-            <a:spAutoFit/>
-          </a:bodyPr>
-          <a:lstStyle/>
-          <a:p>
-            <a:pPr algn="r">
-              <a:spcAft>
-                <a:spcPts val="600"/>
-              </a:spcAft>
-            </a:pPr>
-            <a:r>
-              <a:rPr sz="1000" b="0" i="0">
-                <a:solidFill>
-                  <a:srgbClr val="4A5260"/>
-                </a:solidFill>
-                <a:latin typeface="Segoe UI"/>
-              </a:rPr>
               <a:t>1 / 7</a:t>
             </a:r>
           </a:p>
@@ -4985,7 +4378,7 @@
       </p:sp>
       <p:sp>
         <p:nvSpPr>
-          <p:cNvPr id="20" name="Rectangle 19"/>
+          <p:cNvPr id="11" name="Rectangle 10"/>
           <p:cNvSpPr/>
           <p:nvPr/>
         </p:nvSpPr>
@@ -5028,6 +4421,110 @@
           </a:p>
         </p:txBody>
       </p:sp>
+      <p:sp>
+        <p:nvSpPr>
+          <p:cNvPr id="7" name="TextBox 6"/>
+          <p:cNvSpPr txBox="1"/>
+          <p:nvPr/>
+        </p:nvSpPr>
+        <p:spPr>
+          <a:xfrm>
+            <a:off x="822960" y="2606040"/>
+            <a:ext cx="6309360" cy="1382430"/>
+          </a:xfrm>
+          <a:prstGeom prst="rect">
+            <a:avLst/>
+          </a:prstGeom>
+          <a:noFill/>
+        </p:spPr>
+        <p:txBody>
+          <a:bodyPr wrap="square" lIns="0" tIns="0" rIns="0" bIns="0" anchor="t">
+            <a:spAutoFit/>
+          </a:bodyPr>
+          <a:lstStyle/>
+          <a:p>
+            <a:pPr algn="l">
+              <a:spcAft>
+                <a:spcPts val="1000"/>
+              </a:spcAft>
+            </a:pPr>
+            <a:r>
+              <a:rPr sz="1900" b="1" i="0" dirty="0">
+                <a:solidFill>
+                  <a:srgbClr val="1A1E27"/>
+                </a:solidFill>
+                <a:latin typeface="Segoe UI"/>
+              </a:rPr>
+              <a:t>Millions of people can't tell if a meal will hurt them — until it's too late.</a:t>
+            </a:r>
+          </a:p>
+          <a:p>
+            <a:pPr algn="l">
+              <a:spcAft>
+                <a:spcPts val="600"/>
+              </a:spcAft>
+            </a:pPr>
+            <a:r>
+              <a:rPr sz="1450" b="0" i="0" dirty="0">
+                <a:solidFill>
+                  <a:srgbClr val="4A5260"/>
+                </a:solidFill>
+                <a:latin typeface="Segoe UI"/>
+              </a:rPr>
+              <a:t>A menu doesn't list hidden ingredients. A home-cooked dish has no label. We built glasses that </a:t>
+            </a:r>
+            <a:r>
+              <a:rPr lang="en-US" sz="1450" b="0" i="0" dirty="0">
+                <a:solidFill>
+                  <a:srgbClr val="4A5260"/>
+                </a:solidFill>
+                <a:latin typeface="Segoe UI"/>
+              </a:rPr>
+              <a:t>answer,</a:t>
+            </a:r>
+            <a:r>
+              <a:rPr sz="1450" b="0" i="0" dirty="0">
+                <a:solidFill>
+                  <a:srgbClr val="4A5260"/>
+                </a:solidFill>
+                <a:latin typeface="Segoe UI"/>
+              </a:rPr>
+              <a:t> “is this safe?” the moment you look at your food and ask.</a:t>
+            </a:r>
+          </a:p>
+        </p:txBody>
+      </p:sp>
+      <p:pic>
+        <p:nvPicPr>
+          <p:cNvPr id="13" name="Picture 12">
+            <a:extLst>
+              <a:ext uri="{FF2B5EF4-FFF2-40B4-BE49-F238E27FC236}">
+                <a16:creationId xmlns:a16="http://schemas.microsoft.com/office/drawing/2014/main" id="{0710D390-AF48-9D43-E258-BFC23EB6DF27}"/>
+              </a:ext>
+            </a:extLst>
+          </p:cNvPr>
+          <p:cNvPicPr>
+            <a:picLocks noChangeAspect="1"/>
+          </p:cNvPicPr>
+          <p:nvPr/>
+        </p:nvPicPr>
+        <p:blipFill>
+          <a:blip r:embed="rId3"/>
+          <a:srcRect l="49380" t="12809" b="7462"/>
+          <a:stretch>
+            <a:fillRect/>
+          </a:stretch>
+        </p:blipFill>
+        <p:spPr>
+          <a:xfrm>
+            <a:off x="6741293" y="2082070"/>
+            <a:ext cx="4963027" cy="4339778"/>
+          </a:xfrm>
+          <a:prstGeom prst="rect">
+            <a:avLst/>
+          </a:prstGeom>
+        </p:spPr>
+      </p:pic>
     </p:spTree>
   </p:cSld>
   <p:clrMapOvr>
@@ -6890,7 +6387,7 @@
               </a:spcAft>
             </a:pPr>
             <a:r>
-              <a:rPr sz="1600" b="0" i="0" dirty="0">
+              <a:rPr sz="1600" b="0" i="0">
                 <a:solidFill>
                   <a:srgbClr val="4A5260"/>
                 </a:solidFill>
@@ -6903,7 +6400,7 @@
       </p:sp>
       <p:pic>
         <p:nvPicPr>
-          <p:cNvPr id="7" name="Picture 6"/>
+          <p:cNvPr id="7" name="Picture 6" descr="collaborative_devices.png"/>
           <p:cNvPicPr>
             <a:picLocks noChangeAspect="1"/>
           </p:cNvPicPr>
@@ -6911,13 +6408,14 @@
         </p:nvPicPr>
         <p:blipFill>
           <a:blip r:embed="rId3"/>
-          <a:srcRect/>
-          <a:stretch/>
+          <a:stretch>
+            <a:fillRect/>
+          </a:stretch>
         </p:blipFill>
         <p:spPr>
           <a:xfrm>
-            <a:off x="2704289" y="1820100"/>
-            <a:ext cx="6780374" cy="4520248"/>
+            <a:off x="3008376" y="1965960"/>
+            <a:ext cx="6172200" cy="4114800"/>
           </a:xfrm>
           <a:prstGeom prst="rect">
             <a:avLst/>
@@ -7289,15 +6787,14 @@
         </p:nvPicPr>
         <p:blipFill>
           <a:blip r:embed="rId3"/>
-          <a:srcRect t="9494"/>
           <a:stretch>
             <a:fillRect/>
           </a:stretch>
         </p:blipFill>
         <p:spPr>
           <a:xfrm>
-            <a:off x="2204515" y="1699008"/>
-            <a:ext cx="7843930" cy="4732780"/>
+            <a:off x="2622698" y="1805879"/>
+            <a:ext cx="6943556" cy="4629040"/>
           </a:xfrm>
           <a:prstGeom prst="rect">
             <a:avLst/>
@@ -9855,7 +9352,7 @@
         </p:nvSpPr>
         <p:spPr>
           <a:xfrm>
-            <a:off x="1815506" y="4714670"/>
+            <a:off x="868680" y="4572000"/>
             <a:ext cx="2194560" cy="1051560"/>
           </a:xfrm>
           <a:prstGeom prst="roundRect">
@@ -9897,7 +9394,7 @@
               </a:spcAft>
             </a:pPr>
             <a:r>
-              <a:rPr sz="1300" b="1" i="0" dirty="0">
+              <a:rPr sz="1300" b="1" i="0">
                 <a:solidFill>
                   <a:srgbClr val="1A1E27"/>
                 </a:solidFill>
@@ -9913,7 +9410,7 @@
               </a:spcAft>
             </a:pPr>
             <a:r>
-              <a:rPr sz="1300" b="1" i="0" dirty="0">
+              <a:rPr sz="1300" b="1" i="0">
                 <a:solidFill>
                   <a:srgbClr val="1A1E27"/>
                 </a:solidFill>
@@ -9932,7 +9429,7 @@
         </p:nvCxnSpPr>
         <p:spPr>
           <a:xfrm>
-            <a:off x="4010066" y="5240450"/>
+            <a:off x="3063240" y="5097780"/>
             <a:ext cx="457200" cy="0"/>
           </a:xfrm>
           <a:prstGeom prst="line">
@@ -9968,7 +9465,7 @@
         </p:nvSpPr>
         <p:spPr>
           <a:xfrm>
-            <a:off x="4467266" y="4714670"/>
+            <a:off x="3520440" y="4572000"/>
             <a:ext cx="2834640" cy="1051560"/>
           </a:xfrm>
           <a:prstGeom prst="roundRect">
@@ -10045,7 +9542,7 @@
         </p:nvCxnSpPr>
         <p:spPr>
           <a:xfrm>
-            <a:off x="7301906" y="5240450"/>
+            <a:off x="6355080" y="5097780"/>
             <a:ext cx="457200" cy="0"/>
           </a:xfrm>
           <a:prstGeom prst="line">
@@ -10081,7 +9578,7 @@
         </p:nvSpPr>
         <p:spPr>
           <a:xfrm>
-            <a:off x="7759106" y="4714670"/>
+            <a:off x="6812280" y="4572000"/>
             <a:ext cx="2743200" cy="1051560"/>
           </a:xfrm>
           <a:prstGeom prst="roundRect">
@@ -11263,7 +10760,7 @@
         <p:spPr>
           <a:xfrm>
             <a:off x="822960" y="2011680"/>
-            <a:ext cx="10515600" cy="230832"/>
+            <a:ext cx="10515600" cy="502920"/>
           </a:xfrm>
           <a:prstGeom prst="rect">
             <a:avLst/>
@@ -11282,22 +10779,13 @@
               </a:spcAft>
             </a:pPr>
             <a:r>
-              <a:rPr lang="en-US" sz="1500" b="1" i="0" dirty="0">
+              <a:rPr sz="1500" b="1" i="0">
                 <a:solidFill>
                   <a:srgbClr val="083D82"/>
                 </a:solidFill>
                 <a:latin typeface="Segoe UI"/>
               </a:rPr>
-              <a:t>N</a:t>
-            </a:r>
-            <a:r>
-              <a:rPr sz="1500" b="1" i="0" dirty="0">
-                <a:solidFill>
-                  <a:srgbClr val="083D82"/>
-                </a:solidFill>
-                <a:latin typeface="Segoe UI"/>
-              </a:rPr>
-              <a:t>PU-READY EDGE AI  · MULTIPATH NETWORKING  · AR GLASSES</a:t>
+              <a:t>REAL NPU-READY EDGE AI  ·  REAL MULTIPATH NETWORKING  ·  REAL AR GLASSES</a:t>
             </a:r>
           </a:p>
         </p:txBody>
